--- a/session21-devops-capstone-final/CampusDesk-Capstone.pptx
+++ b/session21-devops-capstone-final/CampusDesk-Capstone.pptx
@@ -120,20 +120,20 @@
   <p:extLst>
     <p:ext uri="{521415D9-36F7-43E2-AB2F-B90AF26B5E84}">
       <p14:sectionLst xmlns:p14="http://schemas.microsoft.com/office/powerpoint/2010/main">
-        <p14:section name="Opening" id="{0bfb5c63-afc0-1099-9fdb-9d3f5ed973b2}">
+        <p14:section name="Opening" id="{89392434-8fc5-20bb-6e73-2cc18ed97607}">
           <p14:sldIdLst>
             <p14:sldId id="256"/>
             <p14:sldId id="257"/>
             <p14:sldId id="258"/>
           </p14:sldIdLst>
         </p14:section>
-        <p14:section name="Build" id="{1b6e896f-0c70-ac3e-82ae-598e1457dd34}">
+        <p14:section name="Build" id="{4bf5c4d8-e0c0-8e56-9030-87316a7e6f53}">
           <p14:sldIdLst>
             <p14:sldId id="259"/>
             <p14:sldId id="260"/>
           </p14:sldIdLst>
         </p14:section>
-        <p14:section name="Cloud" id="{93274115-0511-e699-d5d0-2b6aab7cca13}">
+        <p14:section name="Cloud" id="{4d2ece96-2854-e094-0ce7-b5927a7b9674}">
           <p14:sldIdLst>
             <p14:sldId id="261"/>
             <p14:sldId id="262"/>
@@ -141,13 +141,13 @@
             <p14:sldId id="264"/>
           </p14:sldIdLst>
         </p14:section>
-        <p14:section name="Findings" id="{7b3b5139-db50-71f4-135f-347f3a76e7d3}">
+        <p14:section name="Findings" id="{1a6b3921-4be4-130c-f3ab-086731703a08}">
           <p14:sldIdLst>
             <p14:sldId id="265"/>
             <p14:sldId id="266"/>
           </p14:sldIdLst>
         </p14:section>
-        <p14:section name="Close" id="{1cae6e4f-9e25-d3eb-45e0-f12db37f0236}">
+        <p14:section name="Close" id="{32ba9986-9bc5-6ada-80a6-76c472f7d10f}">
           <p14:sldIdLst>
             <p14:sldId id="267"/>
             <p14:sldId id="268"/>
@@ -5206,7 +5206,7 @@
                   <a:srgbClr val="5C6B73"/>
                 </a:solidFill>
               </a:rPr>
-              <a:t>21 tests passing</a:t>
+              <a:t>24 tests passing</a:t>
             </a:r>
             <a:endParaRPr lang="en-US" sz="1100" dirty="0"/>
           </a:p>
@@ -9174,7 +9174,7 @@
                   <a:srgbClr val="00A896"/>
                 </a:solidFill>
               </a:rPr>
-              <a:t>21</a:t>
+              <a:t>24</a:t>
             </a:r>
             <a:endParaRPr lang="en-US" sz="5400" dirty="0"/>
           </a:p>
@@ -9499,7 +9499,7 @@
                 <a:ea typeface="Courier New" pitchFamily="34" charset="-122"/>
                 <a:cs typeface="Courier New" pitchFamily="34" charset="-120"/>
               </a:rPr>
-              <a:t>GET/POST       /api/issues</a:t>
+              <a:t>GET/POST       /api/issues   (email required)</a:t>
             </a:r>
             <a:endParaRPr lang="en-US" sz="1100" dirty="0"/>
           </a:p>
@@ -9699,6 +9699,24 @@
                 </a:solidFill>
               </a:rPr>
               <a:t>PRAGMA foreign_keys=ON per connection, or the cascade test would pass for the wrong reason</a:t>
+            </a:r>
+            <a:endParaRPr lang="en-US" sz="1200" dirty="0"/>
+          </a:p>
+          <a:p>
+            <a:pPr marL="342900" indent="-342900">
+              <a:spcAft>
+                <a:spcPts val="600"/>
+              </a:spcAft>
+              <a:buSzPct val="100000"/>
+              <a:buChar char="•"/>
+            </a:pPr>
+            <a:r>
+              <a:rPr lang="en-US" sz="1200" dirty="0">
+                <a:solidFill>
+                  <a:schemeClr val="tx1"/>
+                </a:solidFill>
+              </a:rPr>
+              <a:t>Student mode hides the staff controls; admin mode unlocks them - a demo gate, not security</a:t>
             </a:r>
             <a:endParaRPr lang="en-US" sz="1200" dirty="0"/>
           </a:p>

--- a/session21-devops-capstone-final/CampusDesk-Capstone.pptx
+++ b/session21-devops-capstone-final/CampusDesk-Capstone.pptx
@@ -121,34 +121,34 @@
   <p:extLst>
     <p:ext uri="{521415D9-36F7-43E2-AB2F-B90AF26B5E84}">
       <p14:sectionLst xmlns:p14="http://schemas.microsoft.com/office/powerpoint/2010/main">
-        <p14:section name="Opening" id="{aaf26011-ec1b-4990-f4bf-c99f2c35dd89}">
+        <p14:section name="Opening" id="{5a730ca3-0bda-c756-d428-3181963e1571}">
           <p14:sldIdLst>
             <p14:sldId id="256"/>
             <p14:sldId id="257"/>
             <p14:sldId id="258"/>
           </p14:sldIdLst>
         </p14:section>
-        <p14:section name="Build" id="{27dbd0cc-778c-b04d-e79a-4a74f44c81e6}">
+        <p14:section name="Build" id="{aad5b7cc-0d20-d586-3276-293d7340b693}">
           <p14:sldIdLst>
             <p14:sldId id="259"/>
             <p14:sldId id="260"/>
             <p14:sldId id="261"/>
           </p14:sldIdLst>
         </p14:section>
-        <p14:section name="Cloud" id="{9631f799-5b1e-7cd4-50c8-f2285a57aa63}">
+        <p14:section name="Cloud" id="{f7fab4e5-6978-bb28-68ee-b6dad2a7aff5}">
           <p14:sldIdLst>
             <p14:sldId id="262"/>
             <p14:sldId id="263"/>
             <p14:sldId id="264"/>
           </p14:sldIdLst>
         </p14:section>
-        <p14:section name="Findings" id="{a8cda10d-2783-5c7d-f346-3b81ec949218}">
+        <p14:section name="Findings" id="{f1f1f0d2-3184-061e-8d71-6b25560f16d8}">
           <p14:sldIdLst>
             <p14:sldId id="265"/>
             <p14:sldId id="266"/>
           </p14:sldIdLst>
         </p14:section>
-        <p14:section name="Close" id="{f32c517e-323d-2fe5-45e8-5d5dec97f862}">
+        <p14:section name="Close" id="{1a327624-c473-1fc2-0e56-eb0048049000}">
           <p14:sldIdLst>
             <p14:sldId id="267"/>
             <p14:sldId id="268"/>
@@ -2849,7 +2849,7 @@
                   <a:srgbClr val="02C39A"/>
                 </a:solidFill>
               </a:rPr>
-              <a:t>A campus facility issue tracker, taken from laptop to a monitored EKS cluster</a:t>
+              <a:t>A campus facility issue tracker</a:t>
             </a:r>
             <a:endParaRPr lang="en-US" sz="1800" dirty="0"/>
           </a:p>
@@ -2860,10 +2860,10 @@
             <a:r>
               <a:rPr lang="en-US" sz="1400" dirty="0">
                 <a:solidFill>
-                  <a:srgbClr val="5C6B73"/>
-                </a:solidFill>
-              </a:rPr>
-              <a:t>DevOps Capstone  ·  Session 21  ·  Lakshay Jagga</a:t>
+                  <a:srgbClr val="9FB3B8"/>
+                </a:solidFill>
+              </a:rPr>
+              <a:t>DevOps Capstone  ·  Session 21  ·  Lakshay Jagga  ·  24BCS10398</a:t>
             </a:r>
             <a:endParaRPr lang="en-US" sz="1800" dirty="0"/>
           </a:p>
